--- a/releases/v4.16.0/CSCM-Tool_v4.16.0_Design-Showcase-Team.pptx
+++ b/releases/v4.16.0/CSCM-Tool_v4.16.0_Design-Showcase-Team.pptx
@@ -11917,7 +11917,7 @@
                 </a:solidFill>
                 <a:latin typeface="Calibri"/>
               </a:rPr>
-              <a:t>Version 4.16.0: 1,019 tests, 19 languages</a:t>
+              <a:t>Version 4.16.0: 1,025 tests, 19 languages</a:t>
             </a:r>
           </a:p>
         </p:txBody>
